--- a/The Decorator Design Pattern.pptx
+++ b/The Decorator Design Pattern.pptx
@@ -10,6 +10,12 @@
     <p:sldId id="258" r:id="rId4"/>
     <p:sldId id="259" r:id="rId5"/>
     <p:sldId id="260" r:id="rId6"/>
+    <p:sldId id="261" r:id="rId7"/>
+    <p:sldId id="262" r:id="rId8"/>
+    <p:sldId id="263" r:id="rId9"/>
+    <p:sldId id="264" r:id="rId10"/>
+    <p:sldId id="265" r:id="rId11"/>
+    <p:sldId id="266" r:id="rId12"/>
   </p:sldIdLst>
   <p:sldSz cx="12192000" cy="6858000"/>
   <p:notesSz cx="6858000" cy="9144000"/>
@@ -108,6 +114,11 @@
       </a:defRPr>
     </a:lvl9pPr>
   </p:defaultTextStyle>
+  <p:extLst>
+    <p:ext uri="{EFAFB233-063F-42B5-8137-9DF3F51BA10A}">
+      <p15:sldGuideLst xmlns:p15="http://schemas.microsoft.com/office/powerpoint/2012/main"/>
+    </p:ext>
+  </p:extLst>
 </p:presentation>
 </file>
 
@@ -258,7 +269,7 @@
           <a:p>
             <a:fld id="{4D5ACDB7-EA24-4FCE-B940-18BC38E9B63F}" type="datetimeFigureOut">
               <a:rPr lang="en-US" smtClean="0"/>
-              <a:t>4/16/2024</a:t>
+              <a:t>4/17/2024</a:t>
             </a:fld>
             <a:endParaRPr lang="en-US"/>
           </a:p>
@@ -456,7 +467,7 @@
           <a:p>
             <a:fld id="{4D5ACDB7-EA24-4FCE-B940-18BC38E9B63F}" type="datetimeFigureOut">
               <a:rPr lang="en-US" smtClean="0"/>
-              <a:t>4/16/2024</a:t>
+              <a:t>4/17/2024</a:t>
             </a:fld>
             <a:endParaRPr lang="en-US"/>
           </a:p>
@@ -664,7 +675,7 @@
           <a:p>
             <a:fld id="{4D5ACDB7-EA24-4FCE-B940-18BC38E9B63F}" type="datetimeFigureOut">
               <a:rPr lang="en-US" smtClean="0"/>
-              <a:t>4/16/2024</a:t>
+              <a:t>4/17/2024</a:t>
             </a:fld>
             <a:endParaRPr lang="en-US"/>
           </a:p>
@@ -862,7 +873,7 @@
           <a:p>
             <a:fld id="{4D5ACDB7-EA24-4FCE-B940-18BC38E9B63F}" type="datetimeFigureOut">
               <a:rPr lang="en-US" smtClean="0"/>
-              <a:t>4/16/2024</a:t>
+              <a:t>4/17/2024</a:t>
             </a:fld>
             <a:endParaRPr lang="en-US"/>
           </a:p>
@@ -1137,7 +1148,7 @@
           <a:p>
             <a:fld id="{4D5ACDB7-EA24-4FCE-B940-18BC38E9B63F}" type="datetimeFigureOut">
               <a:rPr lang="en-US" smtClean="0"/>
-              <a:t>4/16/2024</a:t>
+              <a:t>4/17/2024</a:t>
             </a:fld>
             <a:endParaRPr lang="en-US"/>
           </a:p>
@@ -1402,7 +1413,7 @@
           <a:p>
             <a:fld id="{4D5ACDB7-EA24-4FCE-B940-18BC38E9B63F}" type="datetimeFigureOut">
               <a:rPr lang="en-US" smtClean="0"/>
-              <a:t>4/16/2024</a:t>
+              <a:t>4/17/2024</a:t>
             </a:fld>
             <a:endParaRPr lang="en-US"/>
           </a:p>
@@ -1814,7 +1825,7 @@
           <a:p>
             <a:fld id="{4D5ACDB7-EA24-4FCE-B940-18BC38E9B63F}" type="datetimeFigureOut">
               <a:rPr lang="en-US" smtClean="0"/>
-              <a:t>4/16/2024</a:t>
+              <a:t>4/17/2024</a:t>
             </a:fld>
             <a:endParaRPr lang="en-US"/>
           </a:p>
@@ -1955,7 +1966,7 @@
           <a:p>
             <a:fld id="{4D5ACDB7-EA24-4FCE-B940-18BC38E9B63F}" type="datetimeFigureOut">
               <a:rPr lang="en-US" smtClean="0"/>
-              <a:t>4/16/2024</a:t>
+              <a:t>4/17/2024</a:t>
             </a:fld>
             <a:endParaRPr lang="en-US"/>
           </a:p>
@@ -2068,7 +2079,7 @@
           <a:p>
             <a:fld id="{4D5ACDB7-EA24-4FCE-B940-18BC38E9B63F}" type="datetimeFigureOut">
               <a:rPr lang="en-US" smtClean="0"/>
-              <a:t>4/16/2024</a:t>
+              <a:t>4/17/2024</a:t>
             </a:fld>
             <a:endParaRPr lang="en-US"/>
           </a:p>
@@ -2379,7 +2390,7 @@
           <a:p>
             <a:fld id="{4D5ACDB7-EA24-4FCE-B940-18BC38E9B63F}" type="datetimeFigureOut">
               <a:rPr lang="en-US" smtClean="0"/>
-              <a:t>4/16/2024</a:t>
+              <a:t>4/17/2024</a:t>
             </a:fld>
             <a:endParaRPr lang="en-US"/>
           </a:p>
@@ -2667,7 +2678,7 @@
           <a:p>
             <a:fld id="{4D5ACDB7-EA24-4FCE-B940-18BC38E9B63F}" type="datetimeFigureOut">
               <a:rPr lang="en-US" smtClean="0"/>
-              <a:t>4/16/2024</a:t>
+              <a:t>4/17/2024</a:t>
             </a:fld>
             <a:endParaRPr lang="en-US"/>
           </a:p>
@@ -2908,7 +2919,7 @@
           <a:p>
             <a:fld id="{4D5ACDB7-EA24-4FCE-B940-18BC38E9B63F}" type="datetimeFigureOut">
               <a:rPr lang="en-US" smtClean="0"/>
-              <a:t>4/16/2024</a:t>
+              <a:t>4/17/2024</a:t>
             </a:fld>
             <a:endParaRPr lang="en-US"/>
           </a:p>
@@ -3407,6 +3418,316 @@
 </p:sld>
 </file>
 
+<file path=ppt/slides/slide10.xml><?xml version="1.0" encoding="utf-8"?>
+<p:sld xmlns:a="http://schemas.openxmlformats.org/drawingml/2006/main" xmlns:r="http://schemas.openxmlformats.org/officeDocument/2006/relationships" xmlns:p="http://schemas.openxmlformats.org/presentationml/2006/main">
+  <p:cSld>
+    <p:spTree>
+      <p:nvGrpSpPr>
+        <p:cNvPr id="1" name=""/>
+        <p:cNvGrpSpPr/>
+        <p:nvPr/>
+      </p:nvGrpSpPr>
+      <p:grpSpPr>
+        <a:xfrm>
+          <a:off x="0" y="0"/>
+          <a:ext cx="0" cy="0"/>
+          <a:chOff x="0" y="0"/>
+          <a:chExt cx="0" cy="0"/>
+        </a:xfrm>
+      </p:grpSpPr>
+      <p:sp>
+        <p:nvSpPr>
+          <p:cNvPr id="2" name="Title 1">
+            <a:extLst>
+              <a:ext uri="{FF2B5EF4-FFF2-40B4-BE49-F238E27FC236}">
+                <a16:creationId xmlns:a16="http://schemas.microsoft.com/office/drawing/2014/main" id="{A1C61799-64B7-BDA4-41AF-631B78BBB586}"/>
+              </a:ext>
+            </a:extLst>
+          </p:cNvPr>
+          <p:cNvSpPr>
+            <a:spLocks noGrp="1"/>
+          </p:cNvSpPr>
+          <p:nvPr>
+            <p:ph type="title"/>
+          </p:nvPr>
+        </p:nvSpPr>
+        <p:spPr/>
+        <p:txBody>
+          <a:bodyPr/>
+          <a:lstStyle/>
+          <a:p>
+            <a:r>
+              <a:rPr lang="en-US" b="1" i="0" dirty="0">
+                <a:effectLst/>
+                <a:highlight>
+                  <a:srgbClr val="FFFFFF"/>
+                </a:highlight>
+                <a:latin typeface="Söhne"/>
+              </a:rPr>
+              <a:t>Interface Segregation Principle (ISP)</a:t>
+            </a:r>
+            <a:r>
+              <a:rPr lang="en-US" b="0" i="0" dirty="0">
+                <a:solidFill>
+                  <a:srgbClr val="9B9B9B"/>
+                </a:solidFill>
+                <a:effectLst/>
+                <a:highlight>
+                  <a:srgbClr val="FFFFFF"/>
+                </a:highlight>
+                <a:latin typeface="Söhne"/>
+              </a:rPr>
+              <a:t>:</a:t>
+            </a:r>
+            <a:endParaRPr lang="en-US" dirty="0"/>
+          </a:p>
+        </p:txBody>
+      </p:sp>
+      <p:sp>
+        <p:nvSpPr>
+          <p:cNvPr id="3" name="Content Placeholder 2">
+            <a:extLst>
+              <a:ext uri="{FF2B5EF4-FFF2-40B4-BE49-F238E27FC236}">
+                <a16:creationId xmlns:a16="http://schemas.microsoft.com/office/drawing/2014/main" id="{9B7149E3-5AA5-E9D3-677A-C371D90581F5}"/>
+              </a:ext>
+            </a:extLst>
+          </p:cNvPr>
+          <p:cNvSpPr>
+            <a:spLocks noGrp="1"/>
+          </p:cNvSpPr>
+          <p:nvPr>
+            <p:ph idx="1"/>
+          </p:nvPr>
+        </p:nvSpPr>
+        <p:spPr/>
+        <p:txBody>
+          <a:bodyPr/>
+          <a:lstStyle/>
+          <a:p>
+            <a:pPr algn="l">
+              <a:buFont typeface="Arial" panose="020B0604020202020204" pitchFamily="34" charset="0"/>
+              <a:buChar char="•"/>
+            </a:pPr>
+            <a:r>
+              <a:rPr lang="en-US" b="1" i="0" dirty="0">
+                <a:effectLst/>
+                <a:highlight>
+                  <a:srgbClr val="FFFFFF"/>
+                </a:highlight>
+                <a:latin typeface="Söhne"/>
+              </a:rPr>
+              <a:t>Definition</a:t>
+            </a:r>
+            <a:r>
+              <a:rPr lang="en-US" b="0" i="0" dirty="0">
+                <a:effectLst/>
+                <a:highlight>
+                  <a:srgbClr val="FFFFFF"/>
+                </a:highlight>
+                <a:latin typeface="Söhne"/>
+              </a:rPr>
+              <a:t>: Clients should not be forced to depend on interfaces they do not use.</a:t>
+            </a:r>
+          </a:p>
+          <a:p>
+            <a:pPr algn="l">
+              <a:buFont typeface="Arial" panose="020B0604020202020204" pitchFamily="34" charset="0"/>
+              <a:buChar char="•"/>
+            </a:pPr>
+            <a:r>
+              <a:rPr lang="en-US" b="1" i="0" dirty="0">
+                <a:effectLst/>
+                <a:highlight>
+                  <a:srgbClr val="FFFFFF"/>
+                </a:highlight>
+                <a:latin typeface="Söhne"/>
+              </a:rPr>
+              <a:t>Benefit</a:t>
+            </a:r>
+            <a:r>
+              <a:rPr lang="en-US" b="0" i="0" dirty="0">
+                <a:effectLst/>
+                <a:highlight>
+                  <a:srgbClr val="FFFFFF"/>
+                </a:highlight>
+                <a:latin typeface="Söhne"/>
+              </a:rPr>
+              <a:t>: By creating more targeted interfaces, this principle prevents a class from being forced to implement methods it does not use, which promotes a cleaner, more orthogonal design.</a:t>
+            </a:r>
+          </a:p>
+          <a:p>
+            <a:endParaRPr lang="en-US" dirty="0"/>
+          </a:p>
+        </p:txBody>
+      </p:sp>
+    </p:spTree>
+    <p:extLst>
+      <p:ext uri="{BB962C8B-B14F-4D97-AF65-F5344CB8AC3E}">
+        <p14:creationId xmlns:p14="http://schemas.microsoft.com/office/powerpoint/2010/main" val="1247428714"/>
+      </p:ext>
+    </p:extLst>
+  </p:cSld>
+  <p:clrMapOvr>
+    <a:masterClrMapping/>
+  </p:clrMapOvr>
+</p:sld>
+</file>
+
+<file path=ppt/slides/slide11.xml><?xml version="1.0" encoding="utf-8"?>
+<p:sld xmlns:a="http://schemas.openxmlformats.org/drawingml/2006/main" xmlns:r="http://schemas.openxmlformats.org/officeDocument/2006/relationships" xmlns:p="http://schemas.openxmlformats.org/presentationml/2006/main">
+  <p:cSld>
+    <p:spTree>
+      <p:nvGrpSpPr>
+        <p:cNvPr id="1" name=""/>
+        <p:cNvGrpSpPr/>
+        <p:nvPr/>
+      </p:nvGrpSpPr>
+      <p:grpSpPr>
+        <a:xfrm>
+          <a:off x="0" y="0"/>
+          <a:ext cx="0" cy="0"/>
+          <a:chOff x="0" y="0"/>
+          <a:chExt cx="0" cy="0"/>
+        </a:xfrm>
+      </p:grpSpPr>
+      <p:sp>
+        <p:nvSpPr>
+          <p:cNvPr id="2" name="Title 1">
+            <a:extLst>
+              <a:ext uri="{FF2B5EF4-FFF2-40B4-BE49-F238E27FC236}">
+                <a16:creationId xmlns:a16="http://schemas.microsoft.com/office/drawing/2014/main" id="{F7D41AAC-13CC-4681-661C-C875FA04C7FD}"/>
+              </a:ext>
+            </a:extLst>
+          </p:cNvPr>
+          <p:cNvSpPr>
+            <a:spLocks noGrp="1"/>
+          </p:cNvSpPr>
+          <p:nvPr>
+            <p:ph type="title"/>
+          </p:nvPr>
+        </p:nvSpPr>
+        <p:spPr/>
+        <p:txBody>
+          <a:bodyPr/>
+          <a:lstStyle/>
+          <a:p>
+            <a:r>
+              <a:rPr lang="en-US" b="1" i="0" dirty="0">
+                <a:effectLst/>
+                <a:highlight>
+                  <a:srgbClr val="FFFFFF"/>
+                </a:highlight>
+                <a:latin typeface="Söhne"/>
+              </a:rPr>
+              <a:t>Dependency Inversion Principle (DIP)</a:t>
+            </a:r>
+            <a:r>
+              <a:rPr lang="en-US" b="0" i="0" dirty="0">
+                <a:solidFill>
+                  <a:srgbClr val="9B9B9B"/>
+                </a:solidFill>
+                <a:effectLst/>
+                <a:highlight>
+                  <a:srgbClr val="FFFFFF"/>
+                </a:highlight>
+                <a:latin typeface="Söhne"/>
+              </a:rPr>
+              <a:t>:</a:t>
+            </a:r>
+            <a:endParaRPr lang="en-US" dirty="0"/>
+          </a:p>
+        </p:txBody>
+      </p:sp>
+      <p:sp>
+        <p:nvSpPr>
+          <p:cNvPr id="3" name="Content Placeholder 2">
+            <a:extLst>
+              <a:ext uri="{FF2B5EF4-FFF2-40B4-BE49-F238E27FC236}">
+                <a16:creationId xmlns:a16="http://schemas.microsoft.com/office/drawing/2014/main" id="{75BF0698-B17E-5C5B-437B-833C81AAA3FF}"/>
+              </a:ext>
+            </a:extLst>
+          </p:cNvPr>
+          <p:cNvSpPr>
+            <a:spLocks noGrp="1"/>
+          </p:cNvSpPr>
+          <p:nvPr>
+            <p:ph idx="1"/>
+          </p:nvPr>
+        </p:nvSpPr>
+        <p:spPr/>
+        <p:txBody>
+          <a:bodyPr/>
+          <a:lstStyle/>
+          <a:p>
+            <a:pPr algn="l">
+              <a:buFont typeface="Arial" panose="020B0604020202020204" pitchFamily="34" charset="0"/>
+              <a:buChar char="•"/>
+            </a:pPr>
+            <a:r>
+              <a:rPr lang="en-US" b="1" i="0" dirty="0">
+                <a:effectLst/>
+                <a:highlight>
+                  <a:srgbClr val="FFFFFF"/>
+                </a:highlight>
+                <a:latin typeface="Söhne"/>
+              </a:rPr>
+              <a:t>Definition</a:t>
+            </a:r>
+            <a:r>
+              <a:rPr lang="en-US" b="0" i="0" dirty="0">
+                <a:effectLst/>
+                <a:highlight>
+                  <a:srgbClr val="FFFFFF"/>
+                </a:highlight>
+                <a:latin typeface="Söhne"/>
+              </a:rPr>
+              <a:t>: High-level modules should not depend on low-level modules. Both should depend on abstractions (e.g., interfaces), not on concretions (e.g., classes).</a:t>
+            </a:r>
+          </a:p>
+          <a:p>
+            <a:pPr algn="l">
+              <a:buFont typeface="Arial" panose="020B0604020202020204" pitchFamily="34" charset="0"/>
+              <a:buChar char="•"/>
+            </a:pPr>
+            <a:r>
+              <a:rPr lang="en-US" b="1" i="0" dirty="0">
+                <a:effectLst/>
+                <a:highlight>
+                  <a:srgbClr val="FFFFFF"/>
+                </a:highlight>
+                <a:latin typeface="Söhne"/>
+              </a:rPr>
+              <a:t>Benefit</a:t>
+            </a:r>
+            <a:r>
+              <a:rPr lang="en-US" b="0" i="0" dirty="0">
+                <a:effectLst/>
+                <a:highlight>
+                  <a:srgbClr val="FFFFFF"/>
+                </a:highlight>
+                <a:latin typeface="Söhne"/>
+              </a:rPr>
+              <a:t>: Decoupling the high-level and low-level components of a system reduces direct dependencies, leading to more reusable and robust code architectures.</a:t>
+            </a:r>
+          </a:p>
+          <a:p>
+            <a:endParaRPr lang="en-US" dirty="0"/>
+          </a:p>
+        </p:txBody>
+      </p:sp>
+    </p:spTree>
+    <p:extLst>
+      <p:ext uri="{BB962C8B-B14F-4D97-AF65-F5344CB8AC3E}">
+        <p14:creationId xmlns:p14="http://schemas.microsoft.com/office/powerpoint/2010/main" val="2249661126"/>
+      </p:ext>
+    </p:extLst>
+  </p:cSld>
+  <p:clrMapOvr>
+    <a:masterClrMapping/>
+  </p:clrMapOvr>
+</p:sld>
+</file>
+
 <file path=ppt/slides/slide2.xml><?xml version="1.0" encoding="utf-8"?>
 <p:sld xmlns:a="http://schemas.openxmlformats.org/drawingml/2006/main" xmlns:r="http://schemas.openxmlformats.org/officeDocument/2006/relationships" xmlns:p="http://schemas.openxmlformats.org/presentationml/2006/main">
   <p:cSld>
@@ -3836,6 +4157,556 @@
     <p:extLst>
       <p:ext uri="{BB962C8B-B14F-4D97-AF65-F5344CB8AC3E}">
         <p14:creationId xmlns:p14="http://schemas.microsoft.com/office/powerpoint/2010/main" val="1400904666"/>
+      </p:ext>
+    </p:extLst>
+  </p:cSld>
+  <p:clrMapOvr>
+    <a:masterClrMapping/>
+  </p:clrMapOvr>
+</p:sld>
+</file>
+
+<file path=ppt/slides/slide6.xml><?xml version="1.0" encoding="utf-8"?>
+<p:sld xmlns:a="http://schemas.openxmlformats.org/drawingml/2006/main" xmlns:r="http://schemas.openxmlformats.org/officeDocument/2006/relationships" xmlns:p="http://schemas.openxmlformats.org/presentationml/2006/main">
+  <p:cSld>
+    <p:spTree>
+      <p:nvGrpSpPr>
+        <p:cNvPr id="1" name=""/>
+        <p:cNvGrpSpPr/>
+        <p:nvPr/>
+      </p:nvGrpSpPr>
+      <p:grpSpPr>
+        <a:xfrm>
+          <a:off x="0" y="0"/>
+          <a:ext cx="0" cy="0"/>
+          <a:chOff x="0" y="0"/>
+          <a:chExt cx="0" cy="0"/>
+        </a:xfrm>
+      </p:grpSpPr>
+      <p:sp>
+        <p:nvSpPr>
+          <p:cNvPr id="2" name="Title 1">
+            <a:extLst>
+              <a:ext uri="{FF2B5EF4-FFF2-40B4-BE49-F238E27FC236}">
+                <a16:creationId xmlns:a16="http://schemas.microsoft.com/office/drawing/2014/main" id="{1A03DDD0-7AEB-C39D-3283-4830D75FE924}"/>
+              </a:ext>
+            </a:extLst>
+          </p:cNvPr>
+          <p:cNvSpPr>
+            <a:spLocks noGrp="1"/>
+          </p:cNvSpPr>
+          <p:nvPr>
+            <p:ph type="title"/>
+          </p:nvPr>
+        </p:nvSpPr>
+        <p:spPr/>
+        <p:txBody>
+          <a:bodyPr/>
+          <a:lstStyle/>
+          <a:p>
+            <a:r>
+              <a:rPr lang="en-US" dirty="0"/>
+              <a:t>SOLID Principles</a:t>
+            </a:r>
+          </a:p>
+        </p:txBody>
+      </p:sp>
+      <p:sp>
+        <p:nvSpPr>
+          <p:cNvPr id="3" name="Content Placeholder 2">
+            <a:extLst>
+              <a:ext uri="{FF2B5EF4-FFF2-40B4-BE49-F238E27FC236}">
+                <a16:creationId xmlns:a16="http://schemas.microsoft.com/office/drawing/2014/main" id="{72E8C9FD-27A6-C661-9ED2-519F95838F32}"/>
+              </a:ext>
+            </a:extLst>
+          </p:cNvPr>
+          <p:cNvSpPr>
+            <a:spLocks noGrp="1"/>
+          </p:cNvSpPr>
+          <p:nvPr>
+            <p:ph idx="1"/>
+          </p:nvPr>
+        </p:nvSpPr>
+        <p:spPr/>
+        <p:txBody>
+          <a:bodyPr>
+            <a:normAutofit/>
+          </a:bodyPr>
+          <a:lstStyle/>
+          <a:p>
+            <a:r>
+              <a:rPr lang="en-US" sz="3200" b="0" i="0" dirty="0">
+                <a:effectLst/>
+                <a:highlight>
+                  <a:srgbClr val="FFFFFF"/>
+                </a:highlight>
+                <a:latin typeface="Söhne"/>
+              </a:rPr>
+              <a:t>The SOLID principles are a set of guidelines for object-oriented design and programming that help developers create more maintainable, understandable, and flexible software. The acronym "SOLID" stands for five specific principles, each aimed at reducing dependencies, managing complexity, and facilitating scalability in software systems.</a:t>
+            </a:r>
+            <a:endParaRPr lang="en-US" sz="3200" dirty="0"/>
+          </a:p>
+        </p:txBody>
+      </p:sp>
+    </p:spTree>
+    <p:extLst>
+      <p:ext uri="{BB962C8B-B14F-4D97-AF65-F5344CB8AC3E}">
+        <p14:creationId xmlns:p14="http://schemas.microsoft.com/office/powerpoint/2010/main" val="2188538116"/>
+      </p:ext>
+    </p:extLst>
+  </p:cSld>
+  <p:clrMapOvr>
+    <a:masterClrMapping/>
+  </p:clrMapOvr>
+</p:sld>
+</file>
+
+<file path=ppt/slides/slide7.xml><?xml version="1.0" encoding="utf-8"?>
+<p:sld xmlns:a="http://schemas.openxmlformats.org/drawingml/2006/main" xmlns:r="http://schemas.openxmlformats.org/officeDocument/2006/relationships" xmlns:p="http://schemas.openxmlformats.org/presentationml/2006/main">
+  <p:cSld>
+    <p:spTree>
+      <p:nvGrpSpPr>
+        <p:cNvPr id="1" name=""/>
+        <p:cNvGrpSpPr/>
+        <p:nvPr/>
+      </p:nvGrpSpPr>
+      <p:grpSpPr>
+        <a:xfrm>
+          <a:off x="0" y="0"/>
+          <a:ext cx="0" cy="0"/>
+          <a:chOff x="0" y="0"/>
+          <a:chExt cx="0" cy="0"/>
+        </a:xfrm>
+      </p:grpSpPr>
+      <p:sp>
+        <p:nvSpPr>
+          <p:cNvPr id="2" name="Title 1">
+            <a:extLst>
+              <a:ext uri="{FF2B5EF4-FFF2-40B4-BE49-F238E27FC236}">
+                <a16:creationId xmlns:a16="http://schemas.microsoft.com/office/drawing/2014/main" id="{D8B01867-5F74-9921-C5F2-534DFFE7F29D}"/>
+              </a:ext>
+            </a:extLst>
+          </p:cNvPr>
+          <p:cNvSpPr>
+            <a:spLocks noGrp="1"/>
+          </p:cNvSpPr>
+          <p:nvPr>
+            <p:ph type="title"/>
+          </p:nvPr>
+        </p:nvSpPr>
+        <p:spPr/>
+        <p:txBody>
+          <a:bodyPr/>
+          <a:lstStyle/>
+          <a:p>
+            <a:r>
+              <a:rPr lang="en-US" dirty="0"/>
+              <a:t>Single Responsibility Principle</a:t>
+            </a:r>
+          </a:p>
+        </p:txBody>
+      </p:sp>
+      <p:sp>
+        <p:nvSpPr>
+          <p:cNvPr id="3" name="Content Placeholder 2">
+            <a:extLst>
+              <a:ext uri="{FF2B5EF4-FFF2-40B4-BE49-F238E27FC236}">
+                <a16:creationId xmlns:a16="http://schemas.microsoft.com/office/drawing/2014/main" id="{84A4147F-C30E-B1CC-703A-0AE4942696C0}"/>
+              </a:ext>
+            </a:extLst>
+          </p:cNvPr>
+          <p:cNvSpPr>
+            <a:spLocks noGrp="1"/>
+          </p:cNvSpPr>
+          <p:nvPr>
+            <p:ph idx="1"/>
+          </p:nvPr>
+        </p:nvSpPr>
+        <p:spPr/>
+        <p:txBody>
+          <a:bodyPr/>
+          <a:lstStyle/>
+          <a:p>
+            <a:pPr algn="l">
+              <a:buFont typeface="Arial" panose="020B0604020202020204" pitchFamily="34" charset="0"/>
+              <a:buChar char="•"/>
+            </a:pPr>
+            <a:r>
+              <a:rPr lang="en-US" b="1" i="0" dirty="0">
+                <a:effectLst/>
+                <a:highlight>
+                  <a:srgbClr val="FFFFFF"/>
+                </a:highlight>
+                <a:latin typeface="Söhne"/>
+              </a:rPr>
+              <a:t>Definition</a:t>
+            </a:r>
+            <a:r>
+              <a:rPr lang="en-US" b="0" i="0" dirty="0">
+                <a:effectLst/>
+                <a:highlight>
+                  <a:srgbClr val="FFFFFF"/>
+                </a:highlight>
+                <a:latin typeface="Söhne"/>
+              </a:rPr>
+              <a:t>: A class should have only one reason to change, meaning it should have only one job or responsibility.</a:t>
+            </a:r>
+          </a:p>
+          <a:p>
+            <a:pPr algn="l">
+              <a:buFont typeface="Arial" panose="020B0604020202020204" pitchFamily="34" charset="0"/>
+              <a:buChar char="•"/>
+            </a:pPr>
+            <a:r>
+              <a:rPr lang="en-US" b="1" i="0" dirty="0">
+                <a:effectLst/>
+                <a:highlight>
+                  <a:srgbClr val="FFFFFF"/>
+                </a:highlight>
+                <a:latin typeface="Söhne"/>
+              </a:rPr>
+              <a:t>Benefit</a:t>
+            </a:r>
+            <a:r>
+              <a:rPr lang="en-US" b="0" i="0" dirty="0">
+                <a:effectLst/>
+                <a:highlight>
+                  <a:srgbClr val="FFFFFF"/>
+                </a:highlight>
+                <a:latin typeface="Söhne"/>
+              </a:rPr>
+              <a:t>: Simplifies the understanding and maintenance of the class because changes in one part of the system will affect fewer components.</a:t>
+            </a:r>
+          </a:p>
+          <a:p>
+            <a:endParaRPr lang="en-US" dirty="0"/>
+          </a:p>
+        </p:txBody>
+      </p:sp>
+    </p:spTree>
+    <p:extLst>
+      <p:ext uri="{BB962C8B-B14F-4D97-AF65-F5344CB8AC3E}">
+        <p14:creationId xmlns:p14="http://schemas.microsoft.com/office/powerpoint/2010/main" val="1439320741"/>
+      </p:ext>
+    </p:extLst>
+  </p:cSld>
+  <p:clrMapOvr>
+    <a:masterClrMapping/>
+  </p:clrMapOvr>
+</p:sld>
+</file>
+
+<file path=ppt/slides/slide8.xml><?xml version="1.0" encoding="utf-8"?>
+<p:sld xmlns:a="http://schemas.openxmlformats.org/drawingml/2006/main" xmlns:r="http://schemas.openxmlformats.org/officeDocument/2006/relationships" xmlns:p="http://schemas.openxmlformats.org/presentationml/2006/main">
+  <p:cSld>
+    <p:spTree>
+      <p:nvGrpSpPr>
+        <p:cNvPr id="1" name=""/>
+        <p:cNvGrpSpPr/>
+        <p:nvPr/>
+      </p:nvGrpSpPr>
+      <p:grpSpPr>
+        <a:xfrm>
+          <a:off x="0" y="0"/>
+          <a:ext cx="0" cy="0"/>
+          <a:chOff x="0" y="0"/>
+          <a:chExt cx="0" cy="0"/>
+        </a:xfrm>
+      </p:grpSpPr>
+      <p:sp>
+        <p:nvSpPr>
+          <p:cNvPr id="2" name="Title 1">
+            <a:extLst>
+              <a:ext uri="{FF2B5EF4-FFF2-40B4-BE49-F238E27FC236}">
+                <a16:creationId xmlns:a16="http://schemas.microsoft.com/office/drawing/2014/main" id="{0DA59FBC-FB41-A8E4-0ED9-4295A891FFC3}"/>
+              </a:ext>
+            </a:extLst>
+          </p:cNvPr>
+          <p:cNvSpPr>
+            <a:spLocks noGrp="1"/>
+          </p:cNvSpPr>
+          <p:nvPr>
+            <p:ph type="title"/>
+          </p:nvPr>
+        </p:nvSpPr>
+        <p:spPr/>
+        <p:txBody>
+          <a:bodyPr/>
+          <a:lstStyle/>
+          <a:p>
+            <a:r>
+              <a:rPr lang="en-US" b="1" i="0" dirty="0">
+                <a:effectLst/>
+                <a:highlight>
+                  <a:srgbClr val="FFFFFF"/>
+                </a:highlight>
+                <a:latin typeface="Söhne"/>
+              </a:rPr>
+              <a:t>Open/Closed Principle (OCP)</a:t>
+            </a:r>
+            <a:r>
+              <a:rPr lang="en-US" b="0" i="0" dirty="0">
+                <a:solidFill>
+                  <a:srgbClr val="9B9B9B"/>
+                </a:solidFill>
+                <a:effectLst/>
+                <a:highlight>
+                  <a:srgbClr val="FFFFFF"/>
+                </a:highlight>
+                <a:latin typeface="Söhne"/>
+              </a:rPr>
+              <a:t>:</a:t>
+            </a:r>
+            <a:endParaRPr lang="en-US" dirty="0"/>
+          </a:p>
+        </p:txBody>
+      </p:sp>
+      <p:sp>
+        <p:nvSpPr>
+          <p:cNvPr id="3" name="Content Placeholder 2">
+            <a:extLst>
+              <a:ext uri="{FF2B5EF4-FFF2-40B4-BE49-F238E27FC236}">
+                <a16:creationId xmlns:a16="http://schemas.microsoft.com/office/drawing/2014/main" id="{79762583-55D7-891F-113F-8661ACDECE62}"/>
+              </a:ext>
+            </a:extLst>
+          </p:cNvPr>
+          <p:cNvSpPr>
+            <a:spLocks noGrp="1"/>
+          </p:cNvSpPr>
+          <p:nvPr>
+            <p:ph idx="1"/>
+          </p:nvPr>
+        </p:nvSpPr>
+        <p:spPr/>
+        <p:txBody>
+          <a:bodyPr/>
+          <a:lstStyle/>
+          <a:p>
+            <a:pPr algn="l">
+              <a:buFont typeface="Arial" panose="020B0604020202020204" pitchFamily="34" charset="0"/>
+              <a:buChar char="•"/>
+            </a:pPr>
+            <a:r>
+              <a:rPr lang="en-US" b="1" i="0" dirty="0">
+                <a:effectLst/>
+                <a:highlight>
+                  <a:srgbClr val="FFFFFF"/>
+                </a:highlight>
+                <a:latin typeface="Söhne"/>
+              </a:rPr>
+              <a:t>Definition</a:t>
+            </a:r>
+            <a:r>
+              <a:rPr lang="en-US" b="0" i="0" dirty="0">
+                <a:effectLst/>
+                <a:highlight>
+                  <a:srgbClr val="FFFFFF"/>
+                </a:highlight>
+                <a:latin typeface="Söhne"/>
+              </a:rPr>
+              <a:t>: Software entities (classes, modules, functions, etc.) should be open for extension, but closed for modification.</a:t>
+            </a:r>
+          </a:p>
+          <a:p>
+            <a:pPr algn="l">
+              <a:buFont typeface="Arial" panose="020B0604020202020204" pitchFamily="34" charset="0"/>
+              <a:buChar char="•"/>
+            </a:pPr>
+            <a:r>
+              <a:rPr lang="en-US" b="1" i="0" dirty="0">
+                <a:effectLst/>
+                <a:highlight>
+                  <a:srgbClr val="FFFFFF"/>
+                </a:highlight>
+                <a:latin typeface="Söhne"/>
+              </a:rPr>
+              <a:t>Benefit</a:t>
+            </a:r>
+            <a:r>
+              <a:rPr lang="en-US" b="0" i="0" dirty="0">
+                <a:effectLst/>
+                <a:highlight>
+                  <a:srgbClr val="FFFFFF"/>
+                </a:highlight>
+                <a:latin typeface="Söhne"/>
+              </a:rPr>
+              <a:t>: This allows existing code to run safely without modification while new functionality can be added by extending existing behavior, thereby promoting stability and minimizing bugs introduced by changes.</a:t>
+            </a:r>
+          </a:p>
+          <a:p>
+            <a:endParaRPr lang="en-US" dirty="0"/>
+          </a:p>
+        </p:txBody>
+      </p:sp>
+    </p:spTree>
+    <p:extLst>
+      <p:ext uri="{BB962C8B-B14F-4D97-AF65-F5344CB8AC3E}">
+        <p14:creationId xmlns:p14="http://schemas.microsoft.com/office/powerpoint/2010/main" val="3125700082"/>
+      </p:ext>
+    </p:extLst>
+  </p:cSld>
+  <p:clrMapOvr>
+    <a:masterClrMapping/>
+  </p:clrMapOvr>
+</p:sld>
+</file>
+
+<file path=ppt/slides/slide9.xml><?xml version="1.0" encoding="utf-8"?>
+<p:sld xmlns:a="http://schemas.openxmlformats.org/drawingml/2006/main" xmlns:r="http://schemas.openxmlformats.org/officeDocument/2006/relationships" xmlns:p="http://schemas.openxmlformats.org/presentationml/2006/main">
+  <p:cSld>
+    <p:spTree>
+      <p:nvGrpSpPr>
+        <p:cNvPr id="1" name=""/>
+        <p:cNvGrpSpPr/>
+        <p:nvPr/>
+      </p:nvGrpSpPr>
+      <p:grpSpPr>
+        <a:xfrm>
+          <a:off x="0" y="0"/>
+          <a:ext cx="0" cy="0"/>
+          <a:chOff x="0" y="0"/>
+          <a:chExt cx="0" cy="0"/>
+        </a:xfrm>
+      </p:grpSpPr>
+      <p:sp>
+        <p:nvSpPr>
+          <p:cNvPr id="2" name="Title 1">
+            <a:extLst>
+              <a:ext uri="{FF2B5EF4-FFF2-40B4-BE49-F238E27FC236}">
+                <a16:creationId xmlns:a16="http://schemas.microsoft.com/office/drawing/2014/main" id="{17044890-37B3-8CEC-2FA6-305149E5C3EA}"/>
+              </a:ext>
+            </a:extLst>
+          </p:cNvPr>
+          <p:cNvSpPr>
+            <a:spLocks noGrp="1"/>
+          </p:cNvSpPr>
+          <p:nvPr>
+            <p:ph type="title"/>
+          </p:nvPr>
+        </p:nvSpPr>
+        <p:spPr/>
+        <p:txBody>
+          <a:bodyPr/>
+          <a:lstStyle/>
+          <a:p>
+            <a:r>
+              <a:rPr lang="en-US" b="1" i="0" dirty="0" err="1">
+                <a:effectLst/>
+                <a:highlight>
+                  <a:srgbClr val="FFFFFF"/>
+                </a:highlight>
+                <a:latin typeface="Söhne"/>
+              </a:rPr>
+              <a:t>Liskov</a:t>
+            </a:r>
+            <a:r>
+              <a:rPr lang="en-US" b="1" i="0" dirty="0">
+                <a:effectLst/>
+                <a:highlight>
+                  <a:srgbClr val="FFFFFF"/>
+                </a:highlight>
+                <a:latin typeface="Söhne"/>
+              </a:rPr>
+              <a:t> Substitution Principle (LSP)</a:t>
+            </a:r>
+            <a:r>
+              <a:rPr lang="en-US" b="0" i="0" dirty="0">
+                <a:solidFill>
+                  <a:srgbClr val="9B9B9B"/>
+                </a:solidFill>
+                <a:effectLst/>
+                <a:highlight>
+                  <a:srgbClr val="FFFFFF"/>
+                </a:highlight>
+                <a:latin typeface="Söhne"/>
+              </a:rPr>
+              <a:t>:</a:t>
+            </a:r>
+            <a:endParaRPr lang="en-US" dirty="0"/>
+          </a:p>
+        </p:txBody>
+      </p:sp>
+      <p:sp>
+        <p:nvSpPr>
+          <p:cNvPr id="3" name="Content Placeholder 2">
+            <a:extLst>
+              <a:ext uri="{FF2B5EF4-FFF2-40B4-BE49-F238E27FC236}">
+                <a16:creationId xmlns:a16="http://schemas.microsoft.com/office/drawing/2014/main" id="{500C8176-758A-3B50-2C5A-F84CDA53585B}"/>
+              </a:ext>
+            </a:extLst>
+          </p:cNvPr>
+          <p:cNvSpPr>
+            <a:spLocks noGrp="1"/>
+          </p:cNvSpPr>
+          <p:nvPr>
+            <p:ph idx="1"/>
+          </p:nvPr>
+        </p:nvSpPr>
+        <p:spPr/>
+        <p:txBody>
+          <a:bodyPr/>
+          <a:lstStyle/>
+          <a:p>
+            <a:pPr algn="l">
+              <a:buFont typeface="Arial" panose="020B0604020202020204" pitchFamily="34" charset="0"/>
+              <a:buChar char="•"/>
+            </a:pPr>
+            <a:r>
+              <a:rPr lang="en-US" b="1" i="0" dirty="0">
+                <a:effectLst/>
+                <a:highlight>
+                  <a:srgbClr val="FFFFFF"/>
+                </a:highlight>
+                <a:latin typeface="Söhne"/>
+              </a:rPr>
+              <a:t>Definition</a:t>
+            </a:r>
+            <a:r>
+              <a:rPr lang="en-US" b="0" i="0" dirty="0">
+                <a:effectLst/>
+                <a:highlight>
+                  <a:srgbClr val="FFFFFF"/>
+                </a:highlight>
+                <a:latin typeface="Söhne"/>
+              </a:rPr>
+              <a:t>: Objects in a program should be replaceable with instances of their subtypes without altering the correctness of the program.</a:t>
+            </a:r>
+          </a:p>
+          <a:p>
+            <a:pPr algn="l">
+              <a:buFont typeface="Arial" panose="020B0604020202020204" pitchFamily="34" charset="0"/>
+              <a:buChar char="•"/>
+            </a:pPr>
+            <a:r>
+              <a:rPr lang="en-US" b="1" i="0" dirty="0">
+                <a:effectLst/>
+                <a:highlight>
+                  <a:srgbClr val="FFFFFF"/>
+                </a:highlight>
+                <a:latin typeface="Söhne"/>
+              </a:rPr>
+              <a:t>Benefit</a:t>
+            </a:r>
+            <a:r>
+              <a:rPr lang="en-US" b="0" i="0" dirty="0">
+                <a:effectLst/>
+                <a:highlight>
+                  <a:srgbClr val="FFFFFF"/>
+                </a:highlight>
+                <a:latin typeface="Söhne"/>
+              </a:rPr>
+              <a:t>: Enhances the modularity and interoperability of the code, allowing it to be more robust and reusable.</a:t>
+            </a:r>
+          </a:p>
+          <a:p>
+            <a:endParaRPr lang="en-US" dirty="0"/>
+          </a:p>
+        </p:txBody>
+      </p:sp>
+    </p:spTree>
+    <p:extLst>
+      <p:ext uri="{BB962C8B-B14F-4D97-AF65-F5344CB8AC3E}">
+        <p14:creationId xmlns:p14="http://schemas.microsoft.com/office/powerpoint/2010/main" val="1153523472"/>
       </p:ext>
     </p:extLst>
   </p:cSld>
